--- a/assets/figures-editable/c3-c4/c4-e40.pptx
+++ b/assets/figures-editable/c3-c4/c4-e40.pptx
@@ -3104,8 +3104,8 @@
         </p:nvSpPr>
         <p:spPr>
           <a:xfrm>
-            <a:off x="274320" y="137160"/>
-            <a:ext cx="11612880" cy="365760"/>
+            <a:off x="274320" y="118872"/>
+            <a:ext cx="11612880" cy="340105"/>
           </a:xfrm>
           <a:prstGeom prst="rect">
             <a:avLst/>
@@ -3114,7 +3114,7 @@
           <a:effectLst/>
         </p:spPr>
         <p:txBody>
-          <a:bodyPr wrap="square" lIns="27432" rIns="27432" tIns="18288" bIns="18288" anchor="ctr">
+          <a:bodyPr wrap="none" lIns="18288" rIns="18288" tIns="18288" bIns="18288" anchor="t">
             <a:spAutoFit/>
           </a:bodyPr>
           <a:lstStyle/>
@@ -3125,7 +3125,7 @@
               </a:spcAft>
             </a:pPr>
             <a:r>
-              <a:rPr sz="2100" b="0" i="0">
+              <a:rPr sz="1900" b="1" i="0">
                 <a:solidFill>
                   <a:srgbClr val="8EDBD4"/>
                 </a:solidFill>
@@ -3138,44 +3138,14 @@
       </p:sp>
       <p:sp>
         <p:nvSpPr>
-          <p:cNvPr id="3" name="C4-E40 rect 1" descr="sci-ppt:o001"/>
-          <p:cNvSpPr/>
-          <p:nvPr/>
-        </p:nvSpPr>
-        <p:spPr>
-          <a:xfrm>
-            <a:off x="1188720" y="1188720"/>
-            <a:ext cx="6858000" cy="2148840"/>
-          </a:xfrm>
-          <a:prstGeom prst="rect">
-            <a:avLst/>
-          </a:prstGeom>
-          <a:noFill/>
-          <a:ln w="19050">
-            <a:solidFill>
-              <a:srgbClr val="B4C7D2"/>
-            </a:solidFill>
-          </a:ln>
-          <a:effectLst/>
-        </p:spPr>
-        <p:txBody>
-          <a:bodyPr rtlCol="0" anchor="ctr"/>
-          <a:lstStyle/>
-          <a:p>
-            <a:pPr algn="ctr"/>
-          </a:p>
-        </p:txBody>
-      </p:sp>
-      <p:sp>
-        <p:nvSpPr>
-          <p:cNvPr id="4" name="C4-E40 text 2" descr="sci-ppt:o002"/>
+          <p:cNvPr id="3" name="C4-E40 text 1" descr="sci-ppt:o001"/>
           <p:cNvSpPr txBox="1"/>
           <p:nvPr/>
         </p:nvSpPr>
         <p:spPr>
           <a:xfrm>
-            <a:off x="2743200" y="1828800"/>
-            <a:ext cx="5029200" cy="548640"/>
+            <a:off x="457200" y="914400"/>
+            <a:ext cx="11247120" cy="254889"/>
           </a:xfrm>
           <a:prstGeom prst="rect">
             <a:avLst/>
@@ -3184,7 +3154,7 @@
           <a:effectLst/>
         </p:spPr>
         <p:txBody>
-          <a:bodyPr wrap="square" lIns="27432" rIns="27432" tIns="18288" bIns="18288" anchor="ctr">
+          <a:bodyPr wrap="none" lIns="18288" rIns="18288" tIns="18288" bIns="18288" anchor="t">
             <a:spAutoFit/>
           </a:bodyPr>
           <a:lstStyle/>
@@ -3195,67 +3165,139 @@
               </a:spcAft>
             </a:pPr>
             <a:r>
-              <a:rPr sz="2000" b="0" i="0">
+              <a:rPr sz="1350" b="1" i="0">
+                <a:solidFill>
+                  <a:srgbClr val="8EDBD4"/>
+                </a:solidFill>
+                <a:latin typeface="Arial"/>
+              </a:rPr>
+              <a:t>Integrating by parts twice moves derivatives from δw onto the moment tensor</a:t>
+            </a:r>
+          </a:p>
+        </p:txBody>
+      </p:sp>
+      <p:sp>
+        <p:nvSpPr>
+          <p:cNvPr id="4" name="C4-E40 round_rect 2" descr="sci-ppt:o002"/>
+          <p:cNvSpPr/>
+          <p:nvPr/>
+        </p:nvSpPr>
+        <p:spPr>
+          <a:xfrm>
+            <a:off x="457200" y="1417320"/>
+            <a:ext cx="11247120" cy="960120"/>
+          </a:xfrm>
+          <a:prstGeom prst="roundRect">
+            <a:avLst/>
+          </a:prstGeom>
+          <a:solidFill>
+            <a:srgbClr val="213E4B"/>
+          </a:solidFill>
+          <a:ln w="20320">
+            <a:solidFill>
+              <a:srgbClr val="8EDBD4"/>
+            </a:solidFill>
+          </a:ln>
+          <a:effectLst/>
+        </p:spPr>
+        <p:txBody>
+          <a:bodyPr rtlCol="0" anchor="ctr"/>
+          <a:lstStyle/>
+          <a:p>
+            <a:pPr algn="ctr"/>
+          </a:p>
+        </p:txBody>
+      </p:sp>
+      <p:sp>
+        <p:nvSpPr>
+          <p:cNvPr id="5" name="C4-E40 text 3" descr="sci-ppt:o003"/>
+          <p:cNvSpPr txBox="1"/>
+          <p:nvPr/>
+        </p:nvSpPr>
+        <p:spPr>
+          <a:xfrm>
+            <a:off x="594360" y="1490472"/>
+            <a:ext cx="1005840" cy="247142"/>
+          </a:xfrm>
+          <a:prstGeom prst="rect">
+            <a:avLst/>
+          </a:prstGeom>
+          <a:noFill/>
+          <a:effectLst/>
+        </p:spPr>
+        <p:txBody>
+          <a:bodyPr wrap="none" lIns="18288" rIns="18288" tIns="18288" bIns="18288" anchor="t">
+            <a:spAutoFit/>
+          </a:bodyPr>
+          <a:lstStyle/>
+          <a:p>
+            <a:pPr algn="l">
+              <a:spcAft>
+                <a:spcPts val="0"/>
+              </a:spcAft>
+            </a:pPr>
+            <a:r>
+              <a:rPr sz="1300" b="1" i="0">
+                <a:solidFill>
+                  <a:srgbClr val="8EDBD4"/>
+                </a:solidFill>
+                <a:latin typeface="Arial"/>
+              </a:rPr>
+              <a:t>Start</a:t>
+            </a:r>
+          </a:p>
+        </p:txBody>
+      </p:sp>
+      <p:sp>
+        <p:nvSpPr>
+          <p:cNvPr id="6" name="C4-E40 text 4" descr="sci-ppt:o004"/>
+          <p:cNvSpPr txBox="1"/>
+          <p:nvPr/>
+        </p:nvSpPr>
+        <p:spPr>
+          <a:xfrm>
+            <a:off x="1645920" y="1508760"/>
+            <a:ext cx="6949440" cy="231648"/>
+          </a:xfrm>
+          <a:prstGeom prst="rect">
+            <a:avLst/>
+          </a:prstGeom>
+          <a:noFill/>
+          <a:effectLst/>
+        </p:spPr>
+        <p:txBody>
+          <a:bodyPr wrap="none" lIns="18288" rIns="18288" tIns="18288" bIns="18288" anchor="t">
+            <a:spAutoFit/>
+          </a:bodyPr>
+          <a:lstStyle/>
+          <a:p>
+            <a:pPr algn="l">
+              <a:spcAft>
+                <a:spcPts val="0"/>
+              </a:spcAft>
+            </a:pPr>
+            <a:r>
+              <a:rPr sz="1200" b="1" i="0">
                 <a:solidFill>
                   <a:srgbClr val="E7F0F3"/>
                 </a:solidFill>
                 <a:latin typeface="Arial"/>
               </a:rPr>
-              <a:t>Reference film plane Ω_f</a:t>
-            </a:r>
-          </a:p>
-          <a:p>
-            <a:pPr algn="l">
-              <a:spcAft>
-                <a:spcPts val="0"/>
-              </a:spcAft>
-            </a:pPr>
-            <a:r>
-              <a:rPr sz="2000" b="0" i="0">
-                <a:solidFill>
-                  <a:srgbClr val="E7F0F3"/>
-                </a:solidFill>
-                <a:latin typeface="Arial"/>
-              </a:rPr>
-              <a:t>w(x,y,t), variation δw</a:t>
-            </a:r>
-          </a:p>
-        </p:txBody>
-      </p:sp>
-      <p:cxnSp>
-        <p:nvCxnSpPr>
-          <p:cNvPr id="5" name="C4-E40 arrow 3" descr="sci-ppt:o003"/>
-          <p:cNvCxnSpPr/>
-          <p:nvPr/>
-        </p:nvCxnSpPr>
-        <p:spPr>
-          <a:xfrm>
-            <a:off x="8092440" y="2240280"/>
-            <a:ext cx="1143000" cy="0"/>
-          </a:xfrm>
-          <a:prstGeom prst="line">
-            <a:avLst/>
-          </a:prstGeom>
-          <a:ln w="25400">
-            <a:solidFill>
-              <a:srgbClr val="8EDBD4"/>
-            </a:solidFill>
-            <a:headEnd type="none" w="med" len="med"/>
-            <a:tailEnd type="triangle" w="med" len="med"/>
-          </a:ln>
-          <a:effectLst/>
-        </p:spPr>
-      </p:cxnSp>
-      <p:sp>
-        <p:nvSpPr>
-          <p:cNvPr id="6" name="C4-E40 text 4" descr="sci-ppt:o004"/>
+              <a:t>δU_b = ∫ B_αβ ∂α∂β(δw) dA</a:t>
+            </a:r>
+          </a:p>
+        </p:txBody>
+      </p:sp>
+      <p:sp>
+        <p:nvSpPr>
+          <p:cNvPr id="7" name="C4-E40 text 5" descr="sci-ppt:o005"/>
           <p:cNvSpPr txBox="1"/>
           <p:nvPr/>
         </p:nvSpPr>
         <p:spPr>
           <a:xfrm>
-            <a:off x="9418320" y="2011680"/>
-            <a:ext cx="2286000" cy="548640"/>
+            <a:off x="8778240" y="1508760"/>
+            <a:ext cx="2834640" cy="223900"/>
           </a:xfrm>
           <a:prstGeom prst="rect">
             <a:avLst/>
@@ -3264,293 +3306,7 @@
           <a:effectLst/>
         </p:spPr>
         <p:txBody>
-          <a:bodyPr wrap="square" lIns="27432" rIns="27432" tIns="18288" bIns="18288" anchor="ctr">
-            <a:spAutoFit/>
-          </a:bodyPr>
-          <a:lstStyle/>
-          <a:p>
-            <a:pPr algn="l">
-              <a:spcAft>
-                <a:spcPts val="0"/>
-              </a:spcAft>
-            </a:pPr>
-            <a:r>
-              <a:rPr sz="1600" b="0" i="0">
-                <a:solidFill>
-                  <a:srgbClr val="E7F0F3"/>
-                </a:solidFill>
-                <a:latin typeface="Arial"/>
-              </a:rPr>
-              <a:t>n: outward</a:t>
-            </a:r>
-          </a:p>
-          <a:p>
-            <a:pPr algn="l">
-              <a:spcAft>
-                <a:spcPts val="0"/>
-              </a:spcAft>
-            </a:pPr>
-            <a:r>
-              <a:rPr sz="1600" b="0" i="0">
-                <a:solidFill>
-                  <a:srgbClr val="E7F0F3"/>
-                </a:solidFill>
-                <a:latin typeface="Arial"/>
-              </a:rPr>
-              <a:t>in-plane normal</a:t>
-            </a:r>
-          </a:p>
-        </p:txBody>
-      </p:sp>
-      <p:cxnSp>
-        <p:nvCxnSpPr>
-          <p:cNvPr id="7" name="C4-E40 arrow 5" descr="sci-ppt:o005"/>
-          <p:cNvCxnSpPr/>
-          <p:nvPr/>
-        </p:nvCxnSpPr>
-        <p:spPr>
-          <a:xfrm>
-            <a:off x="1371600" y="3520440"/>
-            <a:ext cx="1828800" cy="0"/>
-          </a:xfrm>
-          <a:prstGeom prst="line">
-            <a:avLst/>
-          </a:prstGeom>
-          <a:ln w="25400">
-            <a:solidFill>
-              <a:srgbClr val="8EDBD4"/>
-            </a:solidFill>
-            <a:headEnd type="none" w="med" len="med"/>
-            <a:tailEnd type="triangle" w="med" len="med"/>
-          </a:ln>
-          <a:effectLst/>
-        </p:spPr>
-      </p:cxnSp>
-      <p:sp>
-        <p:nvSpPr>
-          <p:cNvPr id="8" name="C4-E40 text 6" descr="sci-ppt:o006"/>
-          <p:cNvSpPr txBox="1"/>
-          <p:nvPr/>
-        </p:nvSpPr>
-        <p:spPr>
-          <a:xfrm>
-            <a:off x="3383280" y="3383280"/>
-            <a:ext cx="914400" cy="274320"/>
-          </a:xfrm>
-          <a:prstGeom prst="rect">
-            <a:avLst/>
-          </a:prstGeom>
-          <a:noFill/>
-          <a:effectLst/>
-        </p:spPr>
-        <p:txBody>
-          <a:bodyPr wrap="square" lIns="27432" rIns="27432" tIns="18288" bIns="18288" anchor="ctr">
-            <a:spAutoFit/>
-          </a:bodyPr>
-          <a:lstStyle/>
-          <a:p>
-            <a:pPr algn="l">
-              <a:spcAft>
-                <a:spcPts val="0"/>
-              </a:spcAft>
-            </a:pPr>
-            <a:r>
-              <a:rPr sz="1700" b="0" i="0">
-                <a:solidFill>
-                  <a:srgbClr val="E7F0F3"/>
-                </a:solidFill>
-                <a:latin typeface="Arial"/>
-              </a:rPr>
-              <a:t>x</a:t>
-            </a:r>
-          </a:p>
-        </p:txBody>
-      </p:sp>
-      <p:cxnSp>
-        <p:nvCxnSpPr>
-          <p:cNvPr id="9" name="C4-E40 arrow 7" descr="sci-ppt:o007"/>
-          <p:cNvCxnSpPr/>
-          <p:nvPr/>
-        </p:nvCxnSpPr>
-        <p:spPr>
-          <a:xfrm flipV="1">
-            <a:off x="1371600" y="2651760"/>
-            <a:ext cx="0" cy="868680"/>
-          </a:xfrm>
-          <a:prstGeom prst="line">
-            <a:avLst/>
-          </a:prstGeom>
-          <a:ln w="25400">
-            <a:solidFill>
-              <a:srgbClr val="8EDBD4"/>
-            </a:solidFill>
-            <a:headEnd type="none" w="med" len="med"/>
-            <a:tailEnd type="triangle" w="med" len="med"/>
-          </a:ln>
-          <a:effectLst/>
-        </p:spPr>
-      </p:cxnSp>
-      <p:sp>
-        <p:nvSpPr>
-          <p:cNvPr id="10" name="C4-E40 text 8" descr="sci-ppt:o008"/>
-          <p:cNvSpPr txBox="1"/>
-          <p:nvPr/>
-        </p:nvSpPr>
-        <p:spPr>
-          <a:xfrm>
-            <a:off x="731520" y="2834640"/>
-            <a:ext cx="914400" cy="274320"/>
-          </a:xfrm>
-          <a:prstGeom prst="rect">
-            <a:avLst/>
-          </a:prstGeom>
-          <a:noFill/>
-          <a:effectLst/>
-        </p:spPr>
-        <p:txBody>
-          <a:bodyPr wrap="square" lIns="27432" rIns="27432" tIns="18288" bIns="18288" anchor="ctr">
-            <a:spAutoFit/>
-          </a:bodyPr>
-          <a:lstStyle/>
-          <a:p>
-            <a:pPr algn="l">
-              <a:spcAft>
-                <a:spcPts val="0"/>
-              </a:spcAft>
-            </a:pPr>
-            <a:r>
-              <a:rPr sz="1700" b="0" i="0">
-                <a:solidFill>
-                  <a:srgbClr val="E7F0F3"/>
-                </a:solidFill>
-                <a:latin typeface="Arial"/>
-              </a:rPr>
-              <a:t>y</a:t>
-            </a:r>
-          </a:p>
-        </p:txBody>
-      </p:sp>
-      <p:sp>
-        <p:nvSpPr>
-          <p:cNvPr id="11" name="C4-E40 text 9" descr="sci-ppt:o009"/>
-          <p:cNvSpPr txBox="1"/>
-          <p:nvPr/>
-        </p:nvSpPr>
-        <p:spPr>
-          <a:xfrm>
-            <a:off x="1828800" y="731520"/>
-            <a:ext cx="9601200" cy="320040"/>
-          </a:xfrm>
-          <a:prstGeom prst="rect">
-            <a:avLst/>
-          </a:prstGeom>
-          <a:noFill/>
-          <a:effectLst/>
-        </p:spPr>
-        <p:txBody>
-          <a:bodyPr wrap="square" lIns="27432" rIns="27432" tIns="18288" bIns="18288" anchor="ctr">
-            <a:spAutoFit/>
-          </a:bodyPr>
-          <a:lstStyle/>
-          <a:p>
-            <a:pPr algn="l">
-              <a:spcAft>
-                <a:spcPts val="0"/>
-              </a:spcAft>
-            </a:pPr>
-            <a:r>
-              <a:rPr sz="1900" b="0" i="0">
-                <a:solidFill>
-                  <a:srgbClr val="8EDBD4"/>
-                </a:solidFill>
-                <a:latin typeface="Arial"/>
-              </a:rPr>
-              <a:t>Fixed boundary: δw = 0; ∂ₙδw = 0</a:t>
-            </a:r>
-          </a:p>
-        </p:txBody>
-      </p:sp>
-      <p:sp>
-        <p:nvSpPr>
-          <p:cNvPr id="12" name="C4-E40 text 10" descr="sci-ppt:o010"/>
-          <p:cNvSpPr txBox="1"/>
-          <p:nvPr/>
-        </p:nvSpPr>
-        <p:spPr>
-          <a:xfrm>
-            <a:off x="4846320" y="3520440"/>
-            <a:ext cx="6400800" cy="274320"/>
-          </a:xfrm>
-          <a:prstGeom prst="rect">
-            <a:avLst/>
-          </a:prstGeom>
-          <a:noFill/>
-          <a:effectLst/>
-        </p:spPr>
-        <p:txBody>
-          <a:bodyPr wrap="square" lIns="27432" rIns="27432" tIns="18288" bIns="18288" anchor="ctr">
-            <a:spAutoFit/>
-          </a:bodyPr>
-          <a:lstStyle/>
-          <a:p>
-            <a:pPr algn="l">
-              <a:spcAft>
-                <a:spcPts val="0"/>
-              </a:spcAft>
-            </a:pPr>
-            <a:r>
-              <a:rPr sz="1700" b="0" i="0">
-                <a:solidFill>
-                  <a:srgbClr val="8EDBD4"/>
-                </a:solidFill>
-                <a:latin typeface="Arial"/>
-              </a:rPr>
-              <a:t>Curvature stores U_b; slope stores U_T.</a:t>
-            </a:r>
-          </a:p>
-        </p:txBody>
-      </p:sp>
-      <p:cxnSp>
-        <p:nvCxnSpPr>
-          <p:cNvPr id="13" name="C4-E40 line 11" descr="sci-ppt:o011"/>
-          <p:cNvCxnSpPr/>
-          <p:nvPr/>
-        </p:nvCxnSpPr>
-        <p:spPr>
-          <a:xfrm>
-            <a:off x="274320" y="3977639"/>
-            <a:ext cx="11612880" cy="0"/>
-          </a:xfrm>
-          <a:prstGeom prst="line">
-            <a:avLst/>
-          </a:prstGeom>
-          <a:ln w="12700">
-            <a:solidFill>
-              <a:srgbClr val="405967"/>
-            </a:solidFill>
-          </a:ln>
-          <a:effectLst/>
-        </p:spPr>
-      </p:cxnSp>
-      <p:sp>
-        <p:nvSpPr>
-          <p:cNvPr id="14" name="C4-E40 text 12" descr="sci-ppt:o012"/>
-          <p:cNvSpPr txBox="1"/>
-          <p:nvPr/>
-        </p:nvSpPr>
-        <p:spPr>
-          <a:xfrm>
-            <a:off x="320040" y="4096512"/>
-            <a:ext cx="5715000" cy="246888"/>
-          </a:xfrm>
-          <a:prstGeom prst="rect">
-            <a:avLst/>
-          </a:prstGeom>
-          <a:noFill/>
-          <a:effectLst/>
-        </p:spPr>
-        <p:txBody>
-          <a:bodyPr wrap="square" lIns="27432" rIns="27432" tIns="18288" bIns="18288" anchor="ctr">
+          <a:bodyPr wrap="none" lIns="18288" rIns="18288" tIns="18288" bIns="18288" anchor="t">
             <a:spAutoFit/>
           </a:bodyPr>
           <a:lstStyle/>
@@ -3567,21 +3323,53 @@
                 </a:solidFill>
                 <a:latin typeface="Arial"/>
               </a:rPr>
-              <a:t>• Ω_f — plate interior</a:t>
-            </a:r>
-          </a:p>
-        </p:txBody>
-      </p:sp>
-      <p:sp>
-        <p:nvSpPr>
-          <p:cNvPr id="15" name="C4-E40 text 13" descr="sci-ppt:o013"/>
+              <a:t>derivatives sit on δw</a:t>
+            </a:r>
+          </a:p>
+        </p:txBody>
+      </p:sp>
+      <p:sp>
+        <p:nvSpPr>
+          <p:cNvPr id="8" name="C4-E40 round_rect 6" descr="sci-ppt:o006"/>
+          <p:cNvSpPr/>
+          <p:nvPr/>
+        </p:nvSpPr>
+        <p:spPr>
+          <a:xfrm>
+            <a:off x="457200" y="2514600"/>
+            <a:ext cx="11247120" cy="960120"/>
+          </a:xfrm>
+          <a:prstGeom prst="roundRect">
+            <a:avLst/>
+          </a:prstGeom>
+          <a:solidFill>
+            <a:srgbClr val="213E4B"/>
+          </a:solidFill>
+          <a:ln w="20320">
+            <a:solidFill>
+              <a:srgbClr val="F2B880"/>
+            </a:solidFill>
+          </a:ln>
+          <a:effectLst/>
+        </p:spPr>
+        <p:txBody>
+          <a:bodyPr rtlCol="0" anchor="ctr"/>
+          <a:lstStyle/>
+          <a:p>
+            <a:pPr algn="ctr"/>
+          </a:p>
+        </p:txBody>
+      </p:sp>
+      <p:sp>
+        <p:nvSpPr>
+          <p:cNvPr id="9" name="C4-E40 text 7" descr="sci-ppt:o007"/>
           <p:cNvSpPr txBox="1"/>
           <p:nvPr/>
         </p:nvSpPr>
         <p:spPr>
           <a:xfrm>
-            <a:off x="6217920" y="4096512"/>
-            <a:ext cx="5715000" cy="246888"/>
+            <a:off x="594360" y="2587752"/>
+            <a:ext cx="1005840" cy="247142"/>
           </a:xfrm>
           <a:prstGeom prst="rect">
             <a:avLst/>
@@ -3590,7 +3378,87 @@
           <a:effectLst/>
         </p:spPr>
         <p:txBody>
-          <a:bodyPr wrap="square" lIns="27432" rIns="27432" tIns="18288" bIns="18288" anchor="ctr">
+          <a:bodyPr wrap="none" lIns="18288" rIns="18288" tIns="18288" bIns="18288" anchor="t">
+            <a:spAutoFit/>
+          </a:bodyPr>
+          <a:lstStyle/>
+          <a:p>
+            <a:pPr algn="l">
+              <a:spcAft>
+                <a:spcPts val="0"/>
+              </a:spcAft>
+            </a:pPr>
+            <a:r>
+              <a:rPr sz="1300" b="1" i="0">
+                <a:solidFill>
+                  <a:srgbClr val="F2B880"/>
+                </a:solidFill>
+                <a:latin typeface="Arial"/>
+              </a:rPr>
+              <a:t>Once</a:t>
+            </a:r>
+          </a:p>
+        </p:txBody>
+      </p:sp>
+      <p:sp>
+        <p:nvSpPr>
+          <p:cNvPr id="10" name="C4-E40 text 8" descr="sci-ppt:o008"/>
+          <p:cNvSpPr txBox="1"/>
+          <p:nvPr/>
+        </p:nvSpPr>
+        <p:spPr>
+          <a:xfrm>
+            <a:off x="1645920" y="2606040"/>
+            <a:ext cx="6949440" cy="231648"/>
+          </a:xfrm>
+          <a:prstGeom prst="rect">
+            <a:avLst/>
+          </a:prstGeom>
+          <a:noFill/>
+          <a:effectLst/>
+        </p:spPr>
+        <p:txBody>
+          <a:bodyPr wrap="none" lIns="18288" rIns="18288" tIns="18288" bIns="18288" anchor="t">
+            <a:spAutoFit/>
+          </a:bodyPr>
+          <a:lstStyle/>
+          <a:p>
+            <a:pPr algn="l">
+              <a:spcAft>
+                <a:spcPts val="0"/>
+              </a:spcAft>
+            </a:pPr>
+            <a:r>
+              <a:rPr sz="1200" b="1" i="0">
+                <a:solidFill>
+                  <a:srgbClr val="E7F0F3"/>
+                </a:solidFill>
+                <a:latin typeface="Arial"/>
+              </a:rPr>
+              <a:t>= ∮ n_α B_αβ ∂β(δw) dℓ − ∫ (∂α B_αβ) ∂β(δw) dA</a:t>
+            </a:r>
+          </a:p>
+        </p:txBody>
+      </p:sp>
+      <p:sp>
+        <p:nvSpPr>
+          <p:cNvPr id="11" name="C4-E40 text 9" descr="sci-ppt:o009"/>
+          <p:cNvSpPr txBox="1"/>
+          <p:nvPr/>
+        </p:nvSpPr>
+        <p:spPr>
+          <a:xfrm>
+            <a:off x="8778240" y="2606040"/>
+            <a:ext cx="2834640" cy="223900"/>
+          </a:xfrm>
+          <a:prstGeom prst="rect">
+            <a:avLst/>
+          </a:prstGeom>
+          <a:noFill/>
+          <a:effectLst/>
+        </p:spPr>
+        <p:txBody>
+          <a:bodyPr wrap="none" lIns="18288" rIns="18288" tIns="18288" bIns="18288" anchor="t">
             <a:spAutoFit/>
           </a:bodyPr>
           <a:lstStyle/>
@@ -3607,21 +3475,53 @@
                 </a:solidFill>
                 <a:latin typeface="Arial"/>
               </a:rPr>
-              <a:t>• ∂Ω_f, dℓ — fixed clamped edge</a:t>
-            </a:r>
-          </a:p>
-        </p:txBody>
-      </p:sp>
-      <p:sp>
-        <p:nvSpPr>
-          <p:cNvPr id="16" name="C4-E40 text 14" descr="sci-ppt:o014"/>
+              <a:t>edge moment term appears</a:t>
+            </a:r>
+          </a:p>
+        </p:txBody>
+      </p:sp>
+      <p:sp>
+        <p:nvSpPr>
+          <p:cNvPr id="12" name="C4-E40 round_rect 10" descr="sci-ppt:o010"/>
+          <p:cNvSpPr/>
+          <p:nvPr/>
+        </p:nvSpPr>
+        <p:spPr>
+          <a:xfrm>
+            <a:off x="457200" y="3611880"/>
+            <a:ext cx="11247120" cy="960120"/>
+          </a:xfrm>
+          <a:prstGeom prst="roundRect">
+            <a:avLst/>
+          </a:prstGeom>
+          <a:solidFill>
+            <a:srgbClr val="213E4B"/>
+          </a:solidFill>
+          <a:ln w="20320">
+            <a:solidFill>
+              <a:srgbClr val="F28BA0"/>
+            </a:solidFill>
+          </a:ln>
+          <a:effectLst/>
+        </p:spPr>
+        <p:txBody>
+          <a:bodyPr rtlCol="0" anchor="ctr"/>
+          <a:lstStyle/>
+          <a:p>
+            <a:pPr algn="ctr"/>
+          </a:p>
+        </p:txBody>
+      </p:sp>
+      <p:sp>
+        <p:nvSpPr>
+          <p:cNvPr id="13" name="C4-E40 text 11" descr="sci-ppt:o011"/>
           <p:cNvSpPr txBox="1"/>
           <p:nvPr/>
         </p:nvSpPr>
         <p:spPr>
           <a:xfrm>
-            <a:off x="320040" y="4329684"/>
-            <a:ext cx="5715000" cy="246888"/>
+            <a:off x="594360" y="3685032"/>
+            <a:ext cx="1005840" cy="247142"/>
           </a:xfrm>
           <a:prstGeom prst="rect">
             <a:avLst/>
@@ -3630,7 +3530,87 @@
           <a:effectLst/>
         </p:spPr>
         <p:txBody>
-          <a:bodyPr wrap="square" lIns="27432" rIns="27432" tIns="18288" bIns="18288" anchor="ctr">
+          <a:bodyPr wrap="none" lIns="18288" rIns="18288" tIns="18288" bIns="18288" anchor="t">
+            <a:spAutoFit/>
+          </a:bodyPr>
+          <a:lstStyle/>
+          <a:p>
+            <a:pPr algn="l">
+              <a:spcAft>
+                <a:spcPts val="0"/>
+              </a:spcAft>
+            </a:pPr>
+            <a:r>
+              <a:rPr sz="1300" b="1" i="0">
+                <a:solidFill>
+                  <a:srgbClr val="F28BA0"/>
+                </a:solidFill>
+                <a:latin typeface="Arial"/>
+              </a:rPr>
+              <a:t>Twice</a:t>
+            </a:r>
+          </a:p>
+        </p:txBody>
+      </p:sp>
+      <p:sp>
+        <p:nvSpPr>
+          <p:cNvPr id="14" name="C4-E40 text 12" descr="sci-ppt:o012"/>
+          <p:cNvSpPr txBox="1"/>
+          <p:nvPr/>
+        </p:nvSpPr>
+        <p:spPr>
+          <a:xfrm>
+            <a:off x="1645920" y="3703320"/>
+            <a:ext cx="6949440" cy="231648"/>
+          </a:xfrm>
+          <a:prstGeom prst="rect">
+            <a:avLst/>
+          </a:prstGeom>
+          <a:noFill/>
+          <a:effectLst/>
+        </p:spPr>
+        <p:txBody>
+          <a:bodyPr wrap="none" lIns="18288" rIns="18288" tIns="18288" bIns="18288" anchor="t">
+            <a:spAutoFit/>
+          </a:bodyPr>
+          <a:lstStyle/>
+          <a:p>
+            <a:pPr algn="l">
+              <a:spcAft>
+                <a:spcPts val="0"/>
+              </a:spcAft>
+            </a:pPr>
+            <a:r>
+              <a:rPr sz="1200" b="1" i="0">
+                <a:solidFill>
+                  <a:srgbClr val="E7F0F3"/>
+                </a:solidFill>
+                <a:latin typeface="Arial"/>
+              </a:rPr>
+              <a:t>= ∮ n_α B_αβ ∂β δw dℓ − ∮ nᵦ ∂αB_αβ δw dℓ + ∫ (∂α∂β B_αβ) δw dA</a:t>
+            </a:r>
+          </a:p>
+        </p:txBody>
+      </p:sp>
+      <p:sp>
+        <p:nvSpPr>
+          <p:cNvPr id="15" name="C4-E40 text 13" descr="sci-ppt:o013"/>
+          <p:cNvSpPr txBox="1"/>
+          <p:nvPr/>
+        </p:nvSpPr>
+        <p:spPr>
+          <a:xfrm>
+            <a:off x="8778240" y="3703320"/>
+            <a:ext cx="2834640" cy="223900"/>
+          </a:xfrm>
+          <a:prstGeom prst="rect">
+            <a:avLst/>
+          </a:prstGeom>
+          <a:noFill/>
+          <a:effectLst/>
+        </p:spPr>
+        <p:txBody>
+          <a:bodyPr wrap="none" lIns="18288" rIns="18288" tIns="18288" bIns="18288" anchor="t">
             <a:spAutoFit/>
           </a:bodyPr>
           <a:lstStyle/>
@@ -3647,8 +3627,40 @@
                 </a:solidFill>
                 <a:latin typeface="Arial"/>
               </a:rPr>
-              <a:t>• w, δw — displacement and variation</a:t>
-            </a:r>
+              <a:t>edge shear term appears</a:t>
+            </a:r>
+          </a:p>
+        </p:txBody>
+      </p:sp>
+      <p:sp>
+        <p:nvSpPr>
+          <p:cNvPr id="16" name="C4-E40 round_rect 14" descr="sci-ppt:o014"/>
+          <p:cNvSpPr/>
+          <p:nvPr/>
+        </p:nvSpPr>
+        <p:spPr>
+          <a:xfrm>
+            <a:off x="457200" y="4754880"/>
+            <a:ext cx="5486400" cy="1051560"/>
+          </a:xfrm>
+          <a:prstGeom prst="roundRect">
+            <a:avLst/>
+          </a:prstGeom>
+          <a:solidFill>
+            <a:srgbClr val="213E4B"/>
+          </a:solidFill>
+          <a:ln w="20320">
+            <a:solidFill>
+              <a:srgbClr val="F2B880"/>
+            </a:solidFill>
+          </a:ln>
+          <a:effectLst/>
+        </p:spPr>
+        <p:txBody>
+          <a:bodyPr rtlCol="0" anchor="ctr"/>
+          <a:lstStyle/>
+          <a:p>
+            <a:pPr algn="ctr"/>
           </a:p>
         </p:txBody>
       </p:sp>
@@ -3660,8 +3672,8 @@
         </p:nvSpPr>
         <p:spPr>
           <a:xfrm>
-            <a:off x="6217920" y="4329684"/>
-            <a:ext cx="5715000" cy="246888"/>
+            <a:off x="566928" y="4809744"/>
+            <a:ext cx="5266944" cy="247142"/>
           </a:xfrm>
           <a:prstGeom prst="rect">
             <a:avLst/>
@@ -3670,7 +3682,7 @@
           <a:effectLst/>
         </p:spPr>
         <p:txBody>
-          <a:bodyPr wrap="square" lIns="27432" rIns="27432" tIns="18288" bIns="18288" anchor="ctr">
+          <a:bodyPr wrap="none" lIns="18288" rIns="18288" tIns="18288" bIns="18288" anchor="t">
             <a:spAutoFit/>
           </a:bodyPr>
           <a:lstStyle/>
@@ -3681,13 +3693,13 @@
               </a:spcAft>
             </a:pPr>
             <a:r>
-              <a:rPr sz="1150" b="0" i="0">
+              <a:rPr sz="1300" b="1" i="0">
                 <a:solidFill>
-                  <a:srgbClr val="B4C7D2"/>
+                  <a:srgbClr val="F2B880"/>
                 </a:solidFill>
                 <a:latin typeface="Arial"/>
               </a:rPr>
-              <a:t>• B_αβ, D_f, ν_f — curvature moments</a:t>
+              <a:t>B_αβ</a:t>
             </a:r>
           </a:p>
         </p:txBody>
@@ -3700,8 +3712,8 @@
         </p:nvSpPr>
         <p:spPr>
           <a:xfrm>
-            <a:off x="320040" y="4562856"/>
-            <a:ext cx="5715000" cy="246888"/>
+            <a:off x="594360" y="5120640"/>
+            <a:ext cx="5212080" cy="231648"/>
           </a:xfrm>
           <a:prstGeom prst="rect">
             <a:avLst/>
@@ -3710,7 +3722,7 @@
           <a:effectLst/>
         </p:spPr>
         <p:txBody>
-          <a:bodyPr wrap="square" lIns="27432" rIns="27432" tIns="18288" bIns="18288" anchor="ctr">
+          <a:bodyPr wrap="none" lIns="18288" rIns="18288" tIns="18288" bIns="18288" anchor="t">
             <a:spAutoFit/>
           </a:bodyPr>
           <a:lstStyle/>
@@ -3721,27 +3733,59 @@
               </a:spcAft>
             </a:pPr>
             <a:r>
-              <a:rPr sz="1150" b="0" i="0">
+              <a:rPr sz="1200" b="1" i="0">
                 <a:solidFill>
-                  <a:srgbClr val="B4C7D2"/>
+                  <a:srgbClr val="E7F0F3"/>
                 </a:solidFill>
                 <a:latin typeface="Arial"/>
               </a:rPr>
-              <a:t>• n_α, n_β — in-plane boundary normal</a:t>
-            </a:r>
-          </a:p>
-        </p:txBody>
-      </p:sp>
-      <p:sp>
-        <p:nvSpPr>
-          <p:cNvPr id="19" name="C4-E40 text 17" descr="sci-ppt:o017"/>
+              <a:t>B_αβ = D_f[(1−ν_f) w_αβ + ν_f δ_αβ ∇²w]</a:t>
+            </a:r>
+          </a:p>
+        </p:txBody>
+      </p:sp>
+      <p:sp>
+        <p:nvSpPr>
+          <p:cNvPr id="19" name="C4-E40 round_rect 17" descr="sci-ppt:o017"/>
+          <p:cNvSpPr/>
+          <p:nvPr/>
+        </p:nvSpPr>
+        <p:spPr>
+          <a:xfrm>
+            <a:off x="6217920" y="4754880"/>
+            <a:ext cx="5486400" cy="1051560"/>
+          </a:xfrm>
+          <a:prstGeom prst="roundRect">
+            <a:avLst/>
+          </a:prstGeom>
+          <a:solidFill>
+            <a:srgbClr val="213E4B"/>
+          </a:solidFill>
+          <a:ln w="20320">
+            <a:solidFill>
+              <a:srgbClr val="8EDBD4"/>
+            </a:solidFill>
+          </a:ln>
+          <a:effectLst/>
+        </p:spPr>
+        <p:txBody>
+          <a:bodyPr rtlCol="0" anchor="ctr"/>
+          <a:lstStyle/>
+          <a:p>
+            <a:pPr algn="ctr"/>
+          </a:p>
+        </p:txBody>
+      </p:sp>
+      <p:sp>
+        <p:nvSpPr>
+          <p:cNvPr id="20" name="C4-E40 text 18" descr="sci-ppt:o018"/>
           <p:cNvSpPr txBox="1"/>
           <p:nvPr/>
         </p:nvSpPr>
         <p:spPr>
           <a:xfrm>
-            <a:off x="6217920" y="4562856"/>
-            <a:ext cx="5715000" cy="246888"/>
+            <a:off x="6327648" y="4809744"/>
+            <a:ext cx="5266944" cy="247142"/>
           </a:xfrm>
           <a:prstGeom prst="rect">
             <a:avLst/>
@@ -3750,7 +3794,7 @@
           <a:effectLst/>
         </p:spPr>
         <p:txBody>
-          <a:bodyPr wrap="square" lIns="27432" rIns="27432" tIns="18288" bIns="18288" anchor="ctr">
+          <a:bodyPr wrap="none" lIns="18288" rIns="18288" tIns="18288" bIns="18288" anchor="t">
             <a:spAutoFit/>
           </a:bodyPr>
           <a:lstStyle/>
@@ -3761,27 +3805,27 @@
               </a:spcAft>
             </a:pPr>
             <a:r>
-              <a:rPr sz="1150" b="0" i="0">
+              <a:rPr sz="1300" b="1" i="0">
                 <a:solidFill>
-                  <a:srgbClr val="B4C7D2"/>
+                  <a:srgbClr val="8EDBD4"/>
                 </a:solidFill>
                 <a:latin typeface="Arial"/>
               </a:rPr>
-              <a:t>• δU_b, δU_T — virtual energy</a:t>
-            </a:r>
-          </a:p>
-        </p:txBody>
-      </p:sp>
-      <p:sp>
-        <p:nvSpPr>
-          <p:cNvPr id="20" name="C4-E40 text 18" descr="sci-ppt:o018"/>
+              <a:t>Fixed clamp</a:t>
+            </a:r>
+          </a:p>
+        </p:txBody>
+      </p:sp>
+      <p:sp>
+        <p:nvSpPr>
+          <p:cNvPr id="21" name="C4-E40 text 19" descr="sci-ppt:o019"/>
           <p:cNvSpPr txBox="1"/>
           <p:nvPr/>
         </p:nvSpPr>
         <p:spPr>
           <a:xfrm>
-            <a:off x="320040" y="4796028"/>
-            <a:ext cx="5715000" cy="246888"/>
+            <a:off x="6355080" y="5120640"/>
+            <a:ext cx="5212080" cy="231648"/>
           </a:xfrm>
           <a:prstGeom prst="rect">
             <a:avLst/>
@@ -3790,7 +3834,7 @@
           <a:effectLst/>
         </p:spPr>
         <p:txBody>
-          <a:bodyPr wrap="square" lIns="27432" rIns="27432" tIns="18288" bIns="18288" anchor="ctr">
+          <a:bodyPr wrap="none" lIns="18288" rIns="18288" tIns="18288" bIns="18288" anchor="t">
             <a:spAutoFit/>
           </a:bodyPr>
           <a:lstStyle/>
@@ -3801,27 +3845,27 @@
               </a:spcAft>
             </a:pPr>
             <a:r>
-              <a:rPr sz="1150" b="0" i="0">
+              <a:rPr sz="1200" b="1" i="0">
                 <a:solidFill>
-                  <a:srgbClr val="B4C7D2"/>
+                  <a:srgbClr val="E7F0F3"/>
                 </a:solidFill>
                 <a:latin typeface="Arial"/>
               </a:rPr>
-              <a:t>• T₀ — pretension</a:t>
-            </a:r>
-          </a:p>
-        </p:txBody>
-      </p:sp>
-      <p:sp>
-        <p:nvSpPr>
-          <p:cNvPr id="21" name="C4-E40 text 19" descr="sci-ppt:o019"/>
+              <a:t>w = 0 and ∂ₙw = 0 on the edge ⇒ both boundary terms vanish</a:t>
+            </a:r>
+          </a:p>
+        </p:txBody>
+      </p:sp>
+      <p:sp>
+        <p:nvSpPr>
+          <p:cNvPr id="22" name="C4-E40 text 20" descr="sci-ppt:o020"/>
           <p:cNvSpPr txBox="1"/>
           <p:nvPr/>
         </p:nvSpPr>
         <p:spPr>
           <a:xfrm>
-            <a:off x="6217920" y="4796028"/>
-            <a:ext cx="5715000" cy="246888"/>
+            <a:off x="320040" y="6510528"/>
+            <a:ext cx="11521440" cy="200660"/>
           </a:xfrm>
           <a:prstGeom prst="rect">
             <a:avLst/>
@@ -3830,127 +3874,7 @@
           <a:effectLst/>
         </p:spPr>
         <p:txBody>
-          <a:bodyPr wrap="square" lIns="27432" rIns="27432" tIns="18288" bIns="18288" anchor="ctr">
-            <a:spAutoFit/>
-          </a:bodyPr>
-          <a:lstStyle/>
-          <a:p>
-            <a:pPr algn="l">
-              <a:spcAft>
-                <a:spcPts val="0"/>
-              </a:spcAft>
-            </a:pPr>
-            <a:r>
-              <a:rPr sz="1150" b="0" i="0">
-                <a:solidFill>
-                  <a:srgbClr val="B4C7D2"/>
-                </a:solidFill>
-                <a:latin typeface="Arial"/>
-              </a:rPr>
-              <a:t>• boundary: δw = 0, ∂ₙδw = 0</a:t>
-            </a:r>
-          </a:p>
-        </p:txBody>
-      </p:sp>
-      <p:sp>
-        <p:nvSpPr>
-          <p:cNvPr id="22" name="C4-E40 text 20" descr="sci-ppt:o020"/>
-          <p:cNvSpPr txBox="1"/>
-          <p:nvPr/>
-        </p:nvSpPr>
-        <p:spPr>
-          <a:xfrm>
-            <a:off x="320040" y="5596128"/>
-            <a:ext cx="11430000" cy="292608"/>
-          </a:xfrm>
-          <a:prstGeom prst="rect">
-            <a:avLst/>
-          </a:prstGeom>
-          <a:noFill/>
-          <a:effectLst/>
-        </p:spPr>
-        <p:txBody>
-          <a:bodyPr wrap="square" lIns="27432" rIns="27432" tIns="18288" bIns="18288" anchor="ctr">
-            <a:spAutoFit/>
-          </a:bodyPr>
-          <a:lstStyle/>
-          <a:p>
-            <a:pPr algn="l">
-              <a:spcAft>
-                <a:spcPts val="0"/>
-              </a:spcAft>
-            </a:pPr>
-            <a:r>
-              <a:rPr sz="1150" b="0" i="0">
-                <a:solidFill>
-                  <a:srgbClr val="8EDBD4"/>
-                </a:solidFill>
-                <a:latin typeface="Arial"/>
-              </a:rPr>
-              <a:t>The first bending boundary term contains the slope variation.</a:t>
-            </a:r>
-          </a:p>
-        </p:txBody>
-      </p:sp>
-      <p:sp>
-        <p:nvSpPr>
-          <p:cNvPr id="23" name="C4-E40 text 21" descr="sci-ppt:o021"/>
-          <p:cNvSpPr txBox="1"/>
-          <p:nvPr/>
-        </p:nvSpPr>
-        <p:spPr>
-          <a:xfrm>
-            <a:off x="320040" y="5870448"/>
-            <a:ext cx="11430000" cy="292608"/>
-          </a:xfrm>
-          <a:prstGeom prst="rect">
-            <a:avLst/>
-          </a:prstGeom>
-          <a:noFill/>
-          <a:effectLst/>
-        </p:spPr>
-        <p:txBody>
-          <a:bodyPr wrap="square" lIns="27432" rIns="27432" tIns="18288" bIns="18288" anchor="ctr">
-            <a:spAutoFit/>
-          </a:bodyPr>
-          <a:lstStyle/>
-          <a:p>
-            <a:pPr algn="l">
-              <a:spcAft>
-                <a:spcPts val="0"/>
-              </a:spcAft>
-            </a:pPr>
-            <a:r>
-              <a:rPr sz="1150" b="0" i="0">
-                <a:solidFill>
-                  <a:srgbClr val="8EDBD4"/>
-                </a:solidFill>
-                <a:latin typeface="Arial"/>
-              </a:rPr>
-              <a:t>The second contains the displacement variation; both vanish at the clamp.</a:t>
-            </a:r>
-          </a:p>
-        </p:txBody>
-      </p:sp>
-      <p:sp>
-        <p:nvSpPr>
-          <p:cNvPr id="24" name="C4-E40 text 22" descr="sci-ppt:o022"/>
-          <p:cNvSpPr txBox="1"/>
-          <p:nvPr/>
-        </p:nvSpPr>
-        <p:spPr>
-          <a:xfrm>
-            <a:off x="320040" y="6473952"/>
-            <a:ext cx="11430000" cy="256032"/>
-          </a:xfrm>
-          <a:prstGeom prst="rect">
-            <a:avLst/>
-          </a:prstGeom>
-          <a:noFill/>
-          <a:effectLst/>
-        </p:spPr>
-        <p:txBody>
-          <a:bodyPr wrap="square" lIns="27432" rIns="27432" tIns="18288" bIns="18288" anchor="ctr">
+          <a:bodyPr wrap="none" lIns="18288" rIns="18288" tIns="18288" bIns="18288" anchor="t">
             <a:spAutoFit/>
           </a:bodyPr>
           <a:lstStyle/>
@@ -3967,7 +3891,7 @@
                 </a:solidFill>
                 <a:latin typeface="Arial"/>
               </a:rPr>
-              <a:t>Model schematic; geometry is not to scale.</a:t>
+              <a:t>Boundary terms of Eq. C4-E40 (the term order follows the equation).</a:t>
             </a:r>
           </a:p>
         </p:txBody>
